--- a/m5/diapositivos/sessao-02-m5-f04.pptx
+++ b/m5/diapositivos/sessao-02-m5-f04.pptx
@@ -3222,7 +3222,35 @@
                 <a:ea typeface="Arial" pitchFamily="34" charset="-122"/>
                 <a:cs typeface="Arial" pitchFamily="34" charset="-120"/>
               </a:rPr>
-              <a:t>Camilo Castelo Branco, Amor de Perdição (1862), cap. IV, grafia da edição.</a:t>
+              <a:t>Camilo Castelo Branco, </a:t>
+            </a:r>
+            <a:pPr indent="0" marL="0">
+              <a:buNone/>
+            </a:pPr>
+            <a:r>
+              <a:rPr lang="en-US" sz="1200" i="1" dirty="0">
+                <a:solidFill>
+                  <a:srgbClr val="A9A79F"/>
+                </a:solidFill>
+                <a:latin typeface="Arial" pitchFamily="34" charset="0"/>
+                <a:ea typeface="Arial" pitchFamily="34" charset="-122"/>
+                <a:cs typeface="Arial" pitchFamily="34" charset="-120"/>
+              </a:rPr>
+              <a:t>Amor de Perdição</a:t>
+            </a:r>
+            <a:pPr indent="0" marL="0">
+              <a:buNone/>
+            </a:pPr>
+            <a:r>
+              <a:rPr lang="en-US" sz="1200" dirty="0">
+                <a:solidFill>
+                  <a:srgbClr val="A9A79F"/>
+                </a:solidFill>
+                <a:latin typeface="Arial" pitchFamily="34" charset="0"/>
+                <a:ea typeface="Arial" pitchFamily="34" charset="-122"/>
+                <a:cs typeface="Arial" pitchFamily="34" charset="-120"/>
+              </a:rPr>
+              <a:t> (1862), cap. IV, grafia da edição.</a:t>
             </a:r>
             <a:endParaRPr lang="en-US" sz="1200" dirty="0"/>
           </a:p>
@@ -3562,7 +3590,35 @@
                 <a:ea typeface="Arial" pitchFamily="34" charset="-122"/>
                 <a:cs typeface="Arial" pitchFamily="34" charset="-120"/>
               </a:rPr>
-              <a:t>Camilo Castelo Branco, Amor de Perdição (1862), cap. IV, grafia da edição.</a:t>
+              <a:t>Camilo Castelo Branco, </a:t>
+            </a:r>
+            <a:pPr indent="0" marL="0">
+              <a:buNone/>
+            </a:pPr>
+            <a:r>
+              <a:rPr lang="en-US" sz="1200" i="1" dirty="0">
+                <a:solidFill>
+                  <a:srgbClr val="A9A79F"/>
+                </a:solidFill>
+                <a:latin typeface="Arial" pitchFamily="34" charset="0"/>
+                <a:ea typeface="Arial" pitchFamily="34" charset="-122"/>
+                <a:cs typeface="Arial" pitchFamily="34" charset="-120"/>
+              </a:rPr>
+              <a:t>Amor de Perdição</a:t>
+            </a:r>
+            <a:pPr indent="0" marL="0">
+              <a:buNone/>
+            </a:pPr>
+            <a:r>
+              <a:rPr lang="en-US" sz="1200" dirty="0">
+                <a:solidFill>
+                  <a:srgbClr val="A9A79F"/>
+                </a:solidFill>
+                <a:latin typeface="Arial" pitchFamily="34" charset="0"/>
+                <a:ea typeface="Arial" pitchFamily="34" charset="-122"/>
+                <a:cs typeface="Arial" pitchFamily="34" charset="-120"/>
+              </a:rPr>
+              <a:t> (1862), cap. IV, grafia da edição.</a:t>
             </a:r>
             <a:endParaRPr lang="en-US" sz="1200" dirty="0"/>
           </a:p>
@@ -4497,7 +4553,7 @@
               <a:buNone/>
             </a:pPr>
             <a:r>
-              <a:rPr lang="en-US" sz="2300" dirty="0">
+              <a:rPr lang="en-US" sz="2300" b="1" dirty="0">
                 <a:solidFill>
                   <a:srgbClr val="F2F0EA"/>
                 </a:solidFill>
@@ -4505,7 +4561,126 @@
                 <a:ea typeface="Georgia" pitchFamily="34" charset="-122"/>
                 <a:cs typeface="Georgia" pitchFamily="34" charset="-120"/>
               </a:rPr>
-              <a:t>Simão Botelho, filho do corregedor de Viseu, e Teresa de Albuquerque amam-se. As duas famílias são inimigas. Tadeu, o pai de Teresa, quer casá-la com um primo, Baltasar Coutinho. No capítulo anterior, Teresa disse ao pai que sim a tudo, para ganhar tempo. O «maldito» de que Tadeu fala é Simão.</a:t>
+              <a:t>Simão Botelho</a:t>
+            </a:r>
+            <a:pPr indent="0" marL="0">
+              <a:lnSpc>
+                <a:spcPct val="120000"/>
+              </a:lnSpc>
+              <a:buNone/>
+            </a:pPr>
+            <a:r>
+              <a:rPr lang="en-US" sz="2300" dirty="0">
+                <a:solidFill>
+                  <a:srgbClr val="F2F0EA"/>
+                </a:solidFill>
+                <a:latin typeface="Georgia" pitchFamily="34" charset="0"/>
+                <a:ea typeface="Georgia" pitchFamily="34" charset="-122"/>
+                <a:cs typeface="Georgia" pitchFamily="34" charset="-120"/>
+              </a:rPr>
+              <a:t>, filho do corregedor de Viseu, e </a:t>
+            </a:r>
+            <a:pPr indent="0" marL="0">
+              <a:lnSpc>
+                <a:spcPct val="120000"/>
+              </a:lnSpc>
+              <a:buNone/>
+            </a:pPr>
+            <a:r>
+              <a:rPr lang="en-US" sz="2300" b="1" dirty="0">
+                <a:solidFill>
+                  <a:srgbClr val="F2F0EA"/>
+                </a:solidFill>
+                <a:latin typeface="Georgia" pitchFamily="34" charset="0"/>
+                <a:ea typeface="Georgia" pitchFamily="34" charset="-122"/>
+                <a:cs typeface="Georgia" pitchFamily="34" charset="-120"/>
+              </a:rPr>
+              <a:t>Teresa de Albuquerque</a:t>
+            </a:r>
+            <a:pPr indent="0" marL="0">
+              <a:lnSpc>
+                <a:spcPct val="120000"/>
+              </a:lnSpc>
+              <a:buNone/>
+            </a:pPr>
+            <a:r>
+              <a:rPr lang="en-US" sz="2300" dirty="0">
+                <a:solidFill>
+                  <a:srgbClr val="F2F0EA"/>
+                </a:solidFill>
+                <a:latin typeface="Georgia" pitchFamily="34" charset="0"/>
+                <a:ea typeface="Georgia" pitchFamily="34" charset="-122"/>
+                <a:cs typeface="Georgia" pitchFamily="34" charset="-120"/>
+              </a:rPr>
+              <a:t> amam-se. As duas famílias são inimigas. </a:t>
+            </a:r>
+            <a:pPr indent="0" marL="0">
+              <a:lnSpc>
+                <a:spcPct val="120000"/>
+              </a:lnSpc>
+              <a:buNone/>
+            </a:pPr>
+            <a:r>
+              <a:rPr lang="en-US" sz="2300" b="1" dirty="0">
+                <a:solidFill>
+                  <a:srgbClr val="F2F0EA"/>
+                </a:solidFill>
+                <a:latin typeface="Georgia" pitchFamily="34" charset="0"/>
+                <a:ea typeface="Georgia" pitchFamily="34" charset="-122"/>
+                <a:cs typeface="Georgia" pitchFamily="34" charset="-120"/>
+              </a:rPr>
+              <a:t>Tadeu</a:t>
+            </a:r>
+            <a:pPr indent="0" marL="0">
+              <a:lnSpc>
+                <a:spcPct val="120000"/>
+              </a:lnSpc>
+              <a:buNone/>
+            </a:pPr>
+            <a:r>
+              <a:rPr lang="en-US" sz="2300" dirty="0">
+                <a:solidFill>
+                  <a:srgbClr val="F2F0EA"/>
+                </a:solidFill>
+                <a:latin typeface="Georgia" pitchFamily="34" charset="0"/>
+                <a:ea typeface="Georgia" pitchFamily="34" charset="-122"/>
+                <a:cs typeface="Georgia" pitchFamily="34" charset="-120"/>
+              </a:rPr>
+              <a:t>, o pai de Teresa, quer casá-la com um primo, </a:t>
+            </a:r>
+            <a:pPr indent="0" marL="0">
+              <a:lnSpc>
+                <a:spcPct val="120000"/>
+              </a:lnSpc>
+              <a:buNone/>
+            </a:pPr>
+            <a:r>
+              <a:rPr lang="en-US" sz="2300" b="1" dirty="0">
+                <a:solidFill>
+                  <a:srgbClr val="F2F0EA"/>
+                </a:solidFill>
+                <a:latin typeface="Georgia" pitchFamily="34" charset="0"/>
+                <a:ea typeface="Georgia" pitchFamily="34" charset="-122"/>
+                <a:cs typeface="Georgia" pitchFamily="34" charset="-120"/>
+              </a:rPr>
+              <a:t>Baltasar Coutinho</a:t>
+            </a:r>
+            <a:pPr indent="0" marL="0">
+              <a:lnSpc>
+                <a:spcPct val="120000"/>
+              </a:lnSpc>
+              <a:buNone/>
+            </a:pPr>
+            <a:r>
+              <a:rPr lang="en-US" sz="2300" dirty="0">
+                <a:solidFill>
+                  <a:srgbClr val="F2F0EA"/>
+                </a:solidFill>
+                <a:latin typeface="Georgia" pitchFamily="34" charset="0"/>
+                <a:ea typeface="Georgia" pitchFamily="34" charset="-122"/>
+                <a:cs typeface="Georgia" pitchFamily="34" charset="-120"/>
+              </a:rPr>
+              <a:t>. No capítulo anterior, Teresa disse ao pai que sim a tudo, para ganhar tempo. O «maldito» de que Tadeu fala é Simão.</a:t>
             </a:r>
             <a:endParaRPr lang="en-US" sz="2300" dirty="0"/>
           </a:p>
@@ -4825,7 +5000,41 @@
                 <a:ea typeface="Georgia" pitchFamily="34" charset="-122"/>
                 <a:cs typeface="Georgia" pitchFamily="34" charset="-120"/>
               </a:rPr>
-              <a:t>No Romantismo, o amor-paixão é absoluto: vale mais do que a família, a fortuna e a própria vida, e leva muitas vezes à perdição e à morte. Contra ele erguem-se a autoridade paterna, a honra das famílias e as conveniências sociais.</a:t>
+              <a:t>No Romantismo, o </a:t>
+            </a:r>
+            <a:pPr indent="0" marL="0">
+              <a:lnSpc>
+                <a:spcPct val="120000"/>
+              </a:lnSpc>
+              <a:buNone/>
+            </a:pPr>
+            <a:r>
+              <a:rPr lang="en-US" sz="2300" b="1" dirty="0">
+                <a:solidFill>
+                  <a:srgbClr val="F2F0EA"/>
+                </a:solidFill>
+                <a:latin typeface="Georgia" pitchFamily="34" charset="0"/>
+                <a:ea typeface="Georgia" pitchFamily="34" charset="-122"/>
+                <a:cs typeface="Georgia" pitchFamily="34" charset="-120"/>
+              </a:rPr>
+              <a:t>amor-paixão</a:t>
+            </a:r>
+            <a:pPr indent="0" marL="0">
+              <a:lnSpc>
+                <a:spcPct val="120000"/>
+              </a:lnSpc>
+              <a:buNone/>
+            </a:pPr>
+            <a:r>
+              <a:rPr lang="en-US" sz="2300" dirty="0">
+                <a:solidFill>
+                  <a:srgbClr val="F2F0EA"/>
+                </a:solidFill>
+                <a:latin typeface="Georgia" pitchFamily="34" charset="0"/>
+                <a:ea typeface="Georgia" pitchFamily="34" charset="-122"/>
+                <a:cs typeface="Georgia" pitchFamily="34" charset="-120"/>
+              </a:rPr>
+              <a:t> é absoluto: vale mais do que a família, a fortuna e a própria vida, e leva muitas vezes à perdição e à morte. Contra ele erguem-se a autoridade paterna, a honra das famílias e as conveniências sociais.</a:t>
             </a:r>
             <a:endParaRPr lang="en-US" sz="2300" dirty="0"/>
           </a:p>
